--- a/docs/MathFestLockMinicourse-Day2.pptx
+++ b/docs/MathFestLockMinicourse-Day2.pptx
@@ -248,7 +248,7 @@
             <a:fld id="{B778E17A-4EC1-45CF-A77D-9CE3FA83CB36}" type="datetimeFigureOut">
               <a:rPr lang="en-US" smtClean="0"/>
               <a:pPr/>
-              <a:t>8/7/2026</a:t>
+              <a:t>8/8/2026</a:t>
             </a:fld>
             <a:endParaRPr lang="en-US"/>
           </a:p>
@@ -415,7 +415,7 @@
             <a:fld id="{CA377D7C-6E98-443D-9186-B6C061ABD919}" type="datetimeFigureOut">
               <a:rPr lang="en-US" smtClean="0"/>
               <a:pPr/>
-              <a:t>8/7/2026</a:t>
+              <a:t>8/8/2026</a:t>
             </a:fld>
             <a:endParaRPr lang="en-US"/>
           </a:p>
@@ -1883,7 +1883,7 @@
             <a:fld id="{D4B648FE-2D5A-45AB-95EB-9243473478A6}" type="datetimeFigureOut">
               <a:rPr lang="en-US" smtClean="0"/>
               <a:pPr/>
-              <a:t>8/7/2026</a:t>
+              <a:t>8/8/2026</a:t>
             </a:fld>
             <a:endParaRPr lang="en-US"/>
           </a:p>
@@ -2053,7 +2053,7 @@
             <a:fld id="{D4B648FE-2D5A-45AB-95EB-9243473478A6}" type="datetimeFigureOut">
               <a:rPr lang="en-US" smtClean="0"/>
               <a:pPr/>
-              <a:t>8/7/2026</a:t>
+              <a:t>8/8/2026</a:t>
             </a:fld>
             <a:endParaRPr lang="en-US"/>
           </a:p>
@@ -2233,7 +2233,7 @@
             <a:fld id="{D4B648FE-2D5A-45AB-95EB-9243473478A6}" type="datetimeFigureOut">
               <a:rPr lang="en-US" smtClean="0"/>
               <a:pPr/>
-              <a:t>8/7/2026</a:t>
+              <a:t>8/8/2026</a:t>
             </a:fld>
             <a:endParaRPr lang="en-US"/>
           </a:p>
@@ -2403,7 +2403,7 @@
             <a:fld id="{D4B648FE-2D5A-45AB-95EB-9243473478A6}" type="datetimeFigureOut">
               <a:rPr lang="en-US" smtClean="0"/>
               <a:pPr/>
-              <a:t>8/7/2026</a:t>
+              <a:t>8/8/2026</a:t>
             </a:fld>
             <a:endParaRPr lang="en-US"/>
           </a:p>
@@ -2650,7 +2650,7 @@
             <a:fld id="{D4B648FE-2D5A-45AB-95EB-9243473478A6}" type="datetimeFigureOut">
               <a:rPr lang="en-US" smtClean="0"/>
               <a:pPr/>
-              <a:t>8/7/2026</a:t>
+              <a:t>8/8/2026</a:t>
             </a:fld>
             <a:endParaRPr lang="en-US"/>
           </a:p>
@@ -2937,7 +2937,7 @@
             <a:fld id="{D4B648FE-2D5A-45AB-95EB-9243473478A6}" type="datetimeFigureOut">
               <a:rPr lang="en-US" smtClean="0"/>
               <a:pPr/>
-              <a:t>8/7/2026</a:t>
+              <a:t>8/8/2026</a:t>
             </a:fld>
             <a:endParaRPr lang="en-US"/>
           </a:p>
@@ -3358,7 +3358,7 @@
             <a:fld id="{D4B648FE-2D5A-45AB-95EB-9243473478A6}" type="datetimeFigureOut">
               <a:rPr lang="en-US" smtClean="0"/>
               <a:pPr/>
-              <a:t>8/7/2026</a:t>
+              <a:t>8/8/2026</a:t>
             </a:fld>
             <a:endParaRPr lang="en-US"/>
           </a:p>
@@ -3477,7 +3477,7 @@
             <a:fld id="{D4B648FE-2D5A-45AB-95EB-9243473478A6}" type="datetimeFigureOut">
               <a:rPr lang="en-US" smtClean="0"/>
               <a:pPr/>
-              <a:t>8/7/2026</a:t>
+              <a:t>8/8/2026</a:t>
             </a:fld>
             <a:endParaRPr lang="en-US"/>
           </a:p>
@@ -3574,7 +3574,7 @@
             <a:fld id="{D4B648FE-2D5A-45AB-95EB-9243473478A6}" type="datetimeFigureOut">
               <a:rPr lang="en-US" smtClean="0"/>
               <a:pPr/>
-              <a:t>8/7/2026</a:t>
+              <a:t>8/8/2026</a:t>
             </a:fld>
             <a:endParaRPr lang="en-US"/>
           </a:p>
@@ -3851,7 +3851,7 @@
             <a:fld id="{D4B648FE-2D5A-45AB-95EB-9243473478A6}" type="datetimeFigureOut">
               <a:rPr lang="en-US" smtClean="0"/>
               <a:pPr/>
-              <a:t>8/7/2026</a:t>
+              <a:t>8/8/2026</a:t>
             </a:fld>
             <a:endParaRPr lang="en-US"/>
           </a:p>
@@ -4105,7 +4105,7 @@
             <a:fld id="{D4B648FE-2D5A-45AB-95EB-9243473478A6}" type="datetimeFigureOut">
               <a:rPr lang="en-US" smtClean="0"/>
               <a:pPr/>
-              <a:t>8/7/2026</a:t>
+              <a:t>8/8/2026</a:t>
             </a:fld>
             <a:endParaRPr lang="en-US"/>
           </a:p>
@@ -4323,7 +4323,7 @@
             <a:fld id="{D4B648FE-2D5A-45AB-95EB-9243473478A6}" type="datetimeFigureOut">
               <a:rPr lang="en-US" smtClean="0"/>
               <a:pPr/>
-              <a:t>8/7/2026</a:t>
+              <a:t>8/8/2026</a:t>
             </a:fld>
             <a:endParaRPr lang="en-US"/>
           </a:p>
@@ -15314,7 +15314,7 @@
         </p:nvSpPr>
         <p:spPr>
           <a:xfrm>
-            <a:off x="688848" y="2885182"/>
+            <a:off x="733778" y="2226796"/>
             <a:ext cx="8074152" cy="1077218"/>
           </a:xfrm>
           <a:prstGeom prst="rect">
@@ -15443,6 +15443,79 @@
               </a:rPr>
               <a:t> </a:t>
             </a:r>
+          </a:p>
+        </p:txBody>
+      </p:sp>
+      <p:pic>
+        <p:nvPicPr>
+          <p:cNvPr id="5" name="Picture 4">
+            <a:extLst>
+              <a:ext uri="{FF2B5EF4-FFF2-40B4-BE49-F238E27FC236}">
+                <a16:creationId xmlns:a16="http://schemas.microsoft.com/office/drawing/2014/main" id="{BE4946AC-307D-2492-0D25-6DA027E8739E}"/>
+              </a:ext>
+            </a:extLst>
+          </p:cNvPr>
+          <p:cNvPicPr>
+            <a:picLocks noChangeAspect="1"/>
+          </p:cNvPicPr>
+          <p:nvPr/>
+        </p:nvPicPr>
+        <p:blipFill>
+          <a:blip r:embed="rId8"/>
+          <a:stretch>
+            <a:fillRect/>
+          </a:stretch>
+        </p:blipFill>
+        <p:spPr>
+          <a:xfrm>
+            <a:off x="5334000" y="3443111"/>
+            <a:ext cx="2238687" cy="2124371"/>
+          </a:xfrm>
+          <a:prstGeom prst="rect">
+            <a:avLst/>
+          </a:prstGeom>
+        </p:spPr>
+      </p:pic>
+      <p:sp>
+        <p:nvSpPr>
+          <p:cNvPr id="7" name="TextBox 6">
+            <a:extLst>
+              <a:ext uri="{FF2B5EF4-FFF2-40B4-BE49-F238E27FC236}">
+                <a16:creationId xmlns:a16="http://schemas.microsoft.com/office/drawing/2014/main" id="{9CEDAED7-4823-67CB-83B2-1E28C4EEB57C}"/>
+              </a:ext>
+            </a:extLst>
+          </p:cNvPr>
+          <p:cNvSpPr txBox="1"/>
+          <p:nvPr/>
+        </p:nvSpPr>
+        <p:spPr>
+          <a:xfrm>
+            <a:off x="2740152" y="3973689"/>
+            <a:ext cx="3657600" cy="584775"/>
+          </a:xfrm>
+          <a:prstGeom prst="rect">
+            <a:avLst/>
+          </a:prstGeom>
+          <a:noFill/>
+        </p:spPr>
+        <p:txBody>
+          <a:bodyPr wrap="square" rtlCol="0">
+            <a:spAutoFit/>
+          </a:bodyPr>
+          <a:lstStyle/>
+          <a:p>
+            <a:r>
+              <a:rPr lang="en-US" sz="3200" dirty="0">
+                <a:latin typeface="Arial" panose="020B0604020202020204" pitchFamily="34" charset="0"/>
+                <a:cs typeface="Arial" panose="020B0604020202020204" pitchFamily="34" charset="0"/>
+                <a:hlinkClick r:id="rId9"/>
+              </a:rPr>
+              <a:t>Evaluation</a:t>
+            </a:r>
+            <a:endParaRPr lang="en-US" sz="3200" dirty="0">
+              <a:latin typeface="Arial" panose="020B0604020202020204" pitchFamily="34" charset="0"/>
+              <a:cs typeface="Arial" panose="020B0604020202020204" pitchFamily="34" charset="0"/>
+            </a:endParaRPr>
           </a:p>
         </p:txBody>
       </p:sp>

--- a/docs/MathFestLockMinicourse-Day2.pptx
+++ b/docs/MathFestLockMinicourse-Day2.pptx
@@ -15314,7 +15314,7 @@
         </p:nvSpPr>
         <p:spPr>
           <a:xfrm>
-            <a:off x="733778" y="2226796"/>
+            <a:off x="685800" y="2198574"/>
             <a:ext cx="8074152" cy="1077218"/>
           </a:xfrm>
           <a:prstGeom prst="rect">
@@ -15451,7 +15451,7 @@
           <p:cNvPr id="5" name="Picture 4">
             <a:extLst>
               <a:ext uri="{FF2B5EF4-FFF2-40B4-BE49-F238E27FC236}">
-                <a16:creationId xmlns:a16="http://schemas.microsoft.com/office/drawing/2014/main" id="{BE4946AC-307D-2492-0D25-6DA027E8739E}"/>
+                <a16:creationId xmlns:a16="http://schemas.microsoft.com/office/drawing/2014/main" id="{2F86A03C-A157-228E-2D89-71965440F250}"/>
               </a:ext>
             </a:extLst>
           </p:cNvPr>
@@ -15468,8 +15468,8 @@
         </p:blipFill>
         <p:spPr>
           <a:xfrm>
-            <a:off x="5334000" y="3443111"/>
-            <a:ext cx="2238687" cy="2124371"/>
+            <a:off x="5657704" y="3502072"/>
+            <a:ext cx="2095792" cy="2048161"/>
           </a:xfrm>
           <a:prstGeom prst="rect">
             <a:avLst/>
@@ -15481,7 +15481,7 @@
           <p:cNvPr id="7" name="TextBox 6">
             <a:extLst>
               <a:ext uri="{FF2B5EF4-FFF2-40B4-BE49-F238E27FC236}">
-                <a16:creationId xmlns:a16="http://schemas.microsoft.com/office/drawing/2014/main" id="{9CEDAED7-4823-67CB-83B2-1E28C4EEB57C}"/>
+                <a16:creationId xmlns:a16="http://schemas.microsoft.com/office/drawing/2014/main" id="{0BFA1B99-F70D-65D9-5348-22ABFA9E0ACA}"/>
               </a:ext>
             </a:extLst>
           </p:cNvPr>
@@ -15490,8 +15490,8 @@
         </p:nvSpPr>
         <p:spPr>
           <a:xfrm>
-            <a:off x="2740152" y="3973689"/>
-            <a:ext cx="3657600" cy="584775"/>
+            <a:off x="3389376" y="4060622"/>
+            <a:ext cx="2667000" cy="584775"/>
           </a:xfrm>
           <a:prstGeom prst="rect">
             <a:avLst/>
